--- a/docs/Soutenance - Amir Redjem.pptx
+++ b/docs/Soutenance - Amir Redjem.pptx
@@ -15116,7 +15116,7 @@
                 </a:solidFill>
                 <a:latin typeface="Calibri"/>
               </a:rPr>
-              <a:t>référent sécurité C, équipe I</a:t>
+              <a:t>référent sécurité C, développeurs I</a:t>
             </a:r>
           </a:p>
         </p:txBody>
